--- a/exports/pptx/lessons/primary-module-08-yoga/day-04-cat-cow.pptx
+++ b/exports/pptx/lessons/primary-module-08-yoga/day-04-cat-cow.pptx
@@ -17,9 +17,11 @@
     <p:sldId id="265" r:id="rId11"/>
     <p:sldId id="266" r:id="rId12"/>
     <p:sldId id="267" r:id="rId13"/>
+    <p:sldId id="268" r:id="rId14"/>
+    <p:sldId id="269" r:id="rId15"/>
   </p:sldIdLst>
   <p:notesMasterIdLst>
-    <p:notesMasterId r:id="rId14"/>
+    <p:notesMasterId r:id="rId16"/>
   </p:notesMasterIdLst>
   <p:sldSz cx="9144000" cy="5143500"/>
   <p:notesSz cx="5143500" cy="9144000"/>
@@ -801,6 +803,182 @@
             <a:fld id="{F7021451-1387-4CA6-816F-3879F97B5CBC}" type="slidenum">
               <a:rPr lang="en-US"/>
               <a:t>12</a:t>
+            </a:fld>
+            <a:endParaRPr lang="en-US"/>
+          </a:p>
+        </p:txBody>
+      </p:sp>
+    </p:spTree>
+    <p:extLst>
+      <p:ext uri="{BB962C8B-B14F-4D97-AF65-F5344CB8AC3E}">
+        <p14:creationId xmlns:p14="http://schemas.microsoft.com/office/powerpoint/2010/main" val="1024086991"/>
+      </p:ext>
+    </p:extLst>
+  </p:cSld>
+  <p:clrMapOvr>
+    <a:masterClrMapping/>
+  </p:clrMapOvr>
+</p:notes>
+</file>
+
+<file path=ppt/notesSlides/notesSlide13.xml><?xml version="1.0" encoding="utf-8"?>
+<p:notes xmlns:a="http://schemas.openxmlformats.org/drawingml/2006/main" xmlns:r="http://schemas.openxmlformats.org/officeDocument/2006/relationships" xmlns:p="http://schemas.openxmlformats.org/presentationml/2006/main">
+  <p:cSld>
+    <p:spTree>
+      <p:nvGrpSpPr>
+        <p:cNvPr id="1" name=""/>
+        <p:cNvGrpSpPr/>
+        <p:nvPr/>
+      </p:nvGrpSpPr>
+      <p:grpSpPr>
+        <a:xfrm>
+          <a:off x="0" y="0"/>
+          <a:ext cx="0" cy="0"/>
+          <a:chOff x="0" y="0"/>
+          <a:chExt cx="0" cy="0"/>
+        </a:xfrm>
+      </p:grpSpPr>
+      <p:sp>
+        <p:nvSpPr>
+          <p:cNvPr id="2" name="Slide Image Placeholder 1"/>
+          <p:cNvSpPr>
+            <a:spLocks noGrp="1" noRot="1" noChangeAspect="1"/>
+          </p:cNvSpPr>
+          <p:nvPr>
+            <p:ph type="sldImg"/>
+          </p:nvPr>
+        </p:nvSpPr>
+        <p:spPr/>
+      </p:sp>
+      <p:sp>
+        <p:nvSpPr>
+          <p:cNvPr id="3" name="Notes Placeholder 2"/>
+          <p:cNvSpPr>
+            <a:spLocks noGrp="1"/>
+          </p:cNvSpPr>
+          <p:nvPr>
+            <p:ph type="body" idx="1"/>
+          </p:nvPr>
+        </p:nvSpPr>
+        <p:spPr/>
+        <p:txBody>
+          <a:bodyPr/>
+          <a:lstStyle/>
+          <a:p>
+            <a:r>
+              <a:rPr lang="en-US" dirty="0"/>
+              <a:t/>
+            </a:r>
+            <a:endParaRPr lang="en-US" dirty="0"/>
+          </a:p>
+        </p:txBody>
+      </p:sp>
+      <p:sp>
+        <p:nvSpPr>
+          <p:cNvPr id="4" name="Slide Number Placeholder 3"/>
+          <p:cNvSpPr>
+            <a:spLocks noGrp="1"/>
+          </p:cNvSpPr>
+          <p:nvPr>
+            <p:ph type="sldNum" sz="quarter" idx="10"/>
+          </p:nvPr>
+        </p:nvSpPr>
+        <p:spPr/>
+        <p:txBody>
+          <a:bodyPr/>
+          <a:lstStyle/>
+          <a:p>
+            <a:fld id="{F7021451-1387-4CA6-816F-3879F97B5CBC}" type="slidenum">
+              <a:rPr lang="en-US"/>
+              <a:t>13</a:t>
+            </a:fld>
+            <a:endParaRPr lang="en-US"/>
+          </a:p>
+        </p:txBody>
+      </p:sp>
+    </p:spTree>
+    <p:extLst>
+      <p:ext uri="{BB962C8B-B14F-4D97-AF65-F5344CB8AC3E}">
+        <p14:creationId xmlns:p14="http://schemas.microsoft.com/office/powerpoint/2010/main" val="1024086991"/>
+      </p:ext>
+    </p:extLst>
+  </p:cSld>
+  <p:clrMapOvr>
+    <a:masterClrMapping/>
+  </p:clrMapOvr>
+</p:notes>
+</file>
+
+<file path=ppt/notesSlides/notesSlide14.xml><?xml version="1.0" encoding="utf-8"?>
+<p:notes xmlns:a="http://schemas.openxmlformats.org/drawingml/2006/main" xmlns:r="http://schemas.openxmlformats.org/officeDocument/2006/relationships" xmlns:p="http://schemas.openxmlformats.org/presentationml/2006/main">
+  <p:cSld>
+    <p:spTree>
+      <p:nvGrpSpPr>
+        <p:cNvPr id="1" name=""/>
+        <p:cNvGrpSpPr/>
+        <p:nvPr/>
+      </p:nvGrpSpPr>
+      <p:grpSpPr>
+        <a:xfrm>
+          <a:off x="0" y="0"/>
+          <a:ext cx="0" cy="0"/>
+          <a:chOff x="0" y="0"/>
+          <a:chExt cx="0" cy="0"/>
+        </a:xfrm>
+      </p:grpSpPr>
+      <p:sp>
+        <p:nvSpPr>
+          <p:cNvPr id="2" name="Slide Image Placeholder 1"/>
+          <p:cNvSpPr>
+            <a:spLocks noGrp="1" noRot="1" noChangeAspect="1"/>
+          </p:cNvSpPr>
+          <p:nvPr>
+            <p:ph type="sldImg"/>
+          </p:nvPr>
+        </p:nvSpPr>
+        <p:spPr/>
+      </p:sp>
+      <p:sp>
+        <p:nvSpPr>
+          <p:cNvPr id="3" name="Notes Placeholder 2"/>
+          <p:cNvSpPr>
+            <a:spLocks noGrp="1"/>
+          </p:cNvSpPr>
+          <p:nvPr>
+            <p:ph type="body" idx="1"/>
+          </p:nvPr>
+        </p:nvSpPr>
+        <p:spPr/>
+        <p:txBody>
+          <a:bodyPr/>
+          <a:lstStyle/>
+          <a:p>
+            <a:r>
+              <a:rPr lang="en-US" dirty="0"/>
+              <a:t/>
+            </a:r>
+            <a:endParaRPr lang="en-US" dirty="0"/>
+          </a:p>
+        </p:txBody>
+      </p:sp>
+      <p:sp>
+        <p:nvSpPr>
+          <p:cNvPr id="4" name="Slide Number Placeholder 3"/>
+          <p:cNvSpPr>
+            <a:spLocks noGrp="1"/>
+          </p:cNvSpPr>
+          <p:nvPr>
+            <p:ph type="sldNum" sz="quarter" idx="10"/>
+          </p:nvPr>
+        </p:nvSpPr>
+        <p:spPr/>
+        <p:txBody>
+          <a:bodyPr/>
+          <a:lstStyle/>
+          <a:p>
+            <a:fld id="{F7021451-1387-4CA6-816F-3879F97B5CBC}" type="slidenum">
+              <a:rPr lang="en-US"/>
+              <a:t>14</a:t>
             </a:fld>
             <a:endParaRPr lang="en-US"/>
           </a:p>
@@ -2054,102 +2232,6 @@
         </p:nvSpPr>
         <p:spPr>
           <a:xfrm>
-            <a:off x="406301" y="1223963"/>
-            <a:ext cx="8498026" cy="274290"/>
-          </a:xfrm>
-          <a:prstGeom prst="rect">
-            <a:avLst/>
-          </a:prstGeom>
-          <a:noFill/>
-          <a:ln/>
-        </p:spPr>
-        <p:txBody>
-          <a:bodyPr wrap="square" lIns="0" tIns="0" rIns="0" bIns="0" rtlCol="0" anchor="t"/>
-          <a:lstStyle/>
-          <a:p>
-            <a:pPr algn="l" indent="0" marL="0">
-              <a:lnSpc>
-                <a:spcPts val="2160"/>
-              </a:lnSpc>
-              <a:spcBef>
-                <a:spcPts val="600"/>
-              </a:spcBef>
-              <a:spcAft>
-                <a:spcPts val="800"/>
-              </a:spcAft>
-              <a:buNone/>
-            </a:pPr>
-            <a:r>
-              <a:rPr lang="en-US" sz="1800" b="1" dirty="0">
-                <a:solidFill>
-                  <a:srgbClr val="E07A5F"/>
-                </a:solidFill>
-                <a:latin typeface="Georgia" pitchFamily="34" charset="0"/>
-                <a:ea typeface="Georgia" pitchFamily="34" charset="-122"/>
-                <a:cs typeface="Georgia" pitchFamily="34" charset="-120"/>
-              </a:rPr>
-              <a:t>Goal</a:t>
-            </a:r>
-            <a:endParaRPr lang="en-US" sz="1800" dirty="0"/>
-          </a:p>
-        </p:txBody>
-      </p:sp>
-      <p:sp>
-        <p:nvSpPr>
-          <p:cNvPr id="6" name="Text 4"/>
-          <p:cNvSpPr/>
-          <p:nvPr/>
-        </p:nvSpPr>
-        <p:spPr>
-          <a:xfrm>
-            <a:off x="406301" y="1637854"/>
-            <a:ext cx="8498026" cy="213271"/>
-          </a:xfrm>
-          <a:prstGeom prst="rect">
-            <a:avLst/>
-          </a:prstGeom>
-          <a:noFill/>
-          <a:ln/>
-        </p:spPr>
-        <p:txBody>
-          <a:bodyPr wrap="square" lIns="0" tIns="0" rIns="0" bIns="0" rtlCol="0" anchor="t"/>
-          <a:lstStyle/>
-          <a:p>
-            <a:pPr algn="l" indent="0" marL="0">
-              <a:lnSpc>
-                <a:spcPts val="1680"/>
-              </a:lnSpc>
-              <a:spcBef>
-                <a:spcPts val="300"/>
-              </a:spcBef>
-              <a:spcAft>
-                <a:spcPts val="300"/>
-              </a:spcAft>
-              <a:buNone/>
-            </a:pPr>
-            <a:r>
-              <a:rPr lang="en-US" sz="1200" dirty="0">
-                <a:solidFill>
-                  <a:srgbClr val="2C2C2C"/>
-                </a:solidFill>
-                <a:latin typeface="Verdana" pitchFamily="34" charset="0"/>
-                <a:ea typeface="Verdana" pitchFamily="34" charset="-122"/>
-                <a:cs typeface="Verdana" pitchFamily="34" charset="-120"/>
-              </a:rPr>
-              <a:t>Children do the cat-cow spine wave with breath co-ordination.</a:t>
-            </a:r>
-            <a:endParaRPr lang="en-US" sz="1200" dirty="0"/>
-          </a:p>
-        </p:txBody>
-      </p:sp>
-      <p:sp>
-        <p:nvSpPr>
-          <p:cNvPr id="7" name="Text 5"/>
-          <p:cNvSpPr/>
-          <p:nvPr/>
-        </p:nvSpPr>
-        <p:spPr>
-          <a:xfrm>
             <a:off x="406301" y="4434929"/>
             <a:ext cx="8498026" cy="213271"/>
           </a:xfrm>
@@ -2294,7 +2376,7 @@
                 <a:ea typeface="Georgia" pitchFamily="34" charset="-122"/>
                 <a:cs typeface="Georgia" pitchFamily="34" charset="-120"/>
               </a:rPr>
-              <a:t>Homework</a:t>
+              <a:t>Reflection (3 min)</a:t>
             </a:r>
             <a:endParaRPr lang="en-US" sz="1800" dirty="0"/>
           </a:p>
@@ -2308,8 +2390,8 @@
         </p:nvSpPr>
         <p:spPr>
           <a:xfrm>
-            <a:off x="406301" y="870942"/>
-            <a:ext cx="8498026" cy="213271"/>
+            <a:off x="634901" y="883593"/>
+            <a:ext cx="8102798" cy="525661"/>
           </a:xfrm>
           <a:prstGeom prst="rect">
             <a:avLst/>
@@ -2321,20 +2403,18 @@
           <a:bodyPr wrap="square" lIns="0" tIns="0" rIns="0" bIns="0" rtlCol="0" anchor="t"/>
           <a:lstStyle/>
           <a:p>
-            <a:pPr algn="l" indent="0" marL="0">
-              <a:lnSpc>
-                <a:spcPts val="1680"/>
-              </a:lnSpc>
-              <a:spcBef>
-                <a:spcPts val="300"/>
-              </a:spcBef>
-              <a:spcAft>
-                <a:spcPts val="300"/>
-              </a:spcAft>
-              <a:buNone/>
-            </a:pPr>
-            <a:r>
-              <a:rPr lang="en-US" sz="1200" dirty="0">
+            <a:pPr algn="l" marL="342900" indent="-342900">
+              <a:lnSpc>
+                <a:spcPts val="1620"/>
+              </a:lnSpc>
+              <a:spcAft>
+                <a:spcPts val="300"/>
+              </a:spcAft>
+              <a:buSzPct val="100000"/>
+              <a:buChar char="•"/>
+            </a:pPr>
+            <a:r>
+              <a:rPr lang="en-US" sz="1200" i="1" dirty="0">
                 <a:solidFill>
                   <a:srgbClr val="2C2C2C"/>
                 </a:solidFill>
@@ -2342,7 +2422,31 @@
                 <a:ea typeface="Verdana" pitchFamily="34" charset="-122"/>
                 <a:cs typeface="Verdana" pitchFamily="34" charset="-120"/>
               </a:rPr>
-              <a:t>– 5 cat-cow waves before breakfast. Make the sounds!</a:t>
+              <a:t>"Which felt better — cat or cow?"</a:t>
+            </a:r>
+            <a:endParaRPr lang="en-US" sz="1200" dirty="0"/>
+          </a:p>
+          <a:p>
+            <a:pPr algn="l" marL="342900" indent="-342900">
+              <a:lnSpc>
+                <a:spcPts val="1620"/>
+              </a:lnSpc>
+              <a:spcAft>
+                <a:spcPts val="300"/>
+              </a:spcAft>
+              <a:buSzPct val="100000"/>
+              <a:buChar char="•"/>
+            </a:pPr>
+            <a:r>
+              <a:rPr lang="en-US" sz="1200" i="1" dirty="0">
+                <a:solidFill>
+                  <a:srgbClr val="2C2C2C"/>
+                </a:solidFill>
+                <a:latin typeface="Verdana" pitchFamily="34" charset="0"/>
+                <a:ea typeface="Verdana" pitchFamily="34" charset="-122"/>
+                <a:cs typeface="Verdana" pitchFamily="34" charset="-120"/>
+              </a:rPr>
+              <a:t>"Did the breath help you move?"</a:t>
             </a:r>
             <a:endParaRPr lang="en-US" sz="1200" dirty="0"/>
           </a:p>
@@ -2500,7 +2604,7 @@
                 <a:ea typeface="Georgia" pitchFamily="34" charset="-122"/>
                 <a:cs typeface="Georgia" pitchFamily="34" charset="-120"/>
               </a:rPr>
-              <a:t>Differentiation</a:t>
+              <a:t>Close (close)</a:t>
             </a:r>
             <a:endParaRPr lang="en-US" sz="1800" dirty="0"/>
           </a:p>
@@ -2514,8 +2618,8 @@
         </p:nvSpPr>
         <p:spPr>
           <a:xfrm>
-            <a:off x="634901" y="883593"/>
-            <a:ext cx="8102798" cy="525661"/>
+            <a:off x="406301" y="870942"/>
+            <a:ext cx="8498026" cy="213271"/>
           </a:xfrm>
           <a:prstGeom prst="rect">
             <a:avLst/>
@@ -2527,18 +2631,20 @@
           <a:bodyPr wrap="square" lIns="0" tIns="0" rIns="0" bIns="0" rtlCol="0" anchor="t"/>
           <a:lstStyle/>
           <a:p>
-            <a:pPr algn="l" marL="342900" indent="-342900">
-              <a:lnSpc>
-                <a:spcPts val="1620"/>
-              </a:lnSpc>
-              <a:spcAft>
-                <a:spcPts val="300"/>
-              </a:spcAft>
-              <a:buSzPct val="100000"/>
-              <a:buChar char="•"/>
-            </a:pPr>
-            <a:r>
-              <a:rPr lang="en-US" sz="1200" b="1" dirty="0">
+            <a:pPr algn="l" indent="0" marL="0">
+              <a:lnSpc>
+                <a:spcPts val="1680"/>
+              </a:lnSpc>
+              <a:spcBef>
+                <a:spcPts val="300"/>
+              </a:spcBef>
+              <a:spcAft>
+                <a:spcPts val="300"/>
+              </a:spcAft>
+              <a:buNone/>
+            </a:pPr>
+            <a:r>
+              <a:rPr lang="en-US" sz="1200" dirty="0">
                 <a:solidFill>
                   <a:srgbClr val="2C2C2C"/>
                 </a:solidFill>
@@ -2546,71 +2652,7 @@
                 <a:ea typeface="Verdana" pitchFamily="34" charset="-122"/>
                 <a:cs typeface="Verdana" pitchFamily="34" charset="-120"/>
               </a:rPr>
-              <a:t>Tier up:</a:t>
-            </a:r>
-            <a:pPr algn="l" indent="0" marL="0">
-              <a:lnSpc>
-                <a:spcPts val="1620"/>
-              </a:lnSpc>
-              <a:spcAft>
-                <a:spcPts val="300"/>
-              </a:spcAft>
-              <a:buNone/>
-            </a:pPr>
-            <a:r>
-              <a:rPr lang="en-US" sz="1200" dirty="0">
-                <a:solidFill>
-                  <a:srgbClr val="2C2C2C"/>
-                </a:solidFill>
-                <a:latin typeface="Verdana" pitchFamily="34" charset="0"/>
-                <a:ea typeface="Verdana" pitchFamily="34" charset="-122"/>
-                <a:cs typeface="Verdana" pitchFamily="34" charset="-120"/>
-              </a:rPr>
-              <a:t> 10 rounds with deeper breathing.</a:t>
-            </a:r>
-            <a:endParaRPr lang="en-US" sz="1200" dirty="0"/>
-          </a:p>
-          <a:p>
-            <a:pPr algn="l" marL="342900" indent="-342900">
-              <a:lnSpc>
-                <a:spcPts val="1620"/>
-              </a:lnSpc>
-              <a:spcAft>
-                <a:spcPts val="300"/>
-              </a:spcAft>
-              <a:buSzPct val="100000"/>
-              <a:buChar char="•"/>
-            </a:pPr>
-            <a:r>
-              <a:rPr lang="en-US" sz="1200" b="1" dirty="0">
-                <a:solidFill>
-                  <a:srgbClr val="2C2C2C"/>
-                </a:solidFill>
-                <a:latin typeface="Verdana" pitchFamily="34" charset="0"/>
-                <a:ea typeface="Verdana" pitchFamily="34" charset="-122"/>
-                <a:cs typeface="Verdana" pitchFamily="34" charset="-120"/>
-              </a:rPr>
-              <a:t>Tier down:</a:t>
-            </a:r>
-            <a:pPr algn="l" indent="0" marL="0">
-              <a:lnSpc>
-                <a:spcPts val="1620"/>
-              </a:lnSpc>
-              <a:spcAft>
-                <a:spcPts val="300"/>
-              </a:spcAft>
-              <a:buNone/>
-            </a:pPr>
-            <a:r>
-              <a:rPr lang="en-US" sz="1200" dirty="0">
-                <a:solidFill>
-                  <a:srgbClr val="2C2C2C"/>
-                </a:solidFill>
-                <a:latin typeface="Verdana" pitchFamily="34" charset="0"/>
-                <a:ea typeface="Verdana" pitchFamily="34" charset="-122"/>
-                <a:cs typeface="Verdana" pitchFamily="34" charset="-120"/>
-              </a:rPr>
-              <a:t> Skip the sounds if shy. Just the movement.</a:t>
+              <a:t>Tāḍāsana. Namaste.</a:t>
             </a:r>
             <a:endParaRPr lang="en-US" sz="1200" dirty="0"/>
           </a:p>
@@ -2768,7 +2810,7 @@
                 <a:ea typeface="Georgia" pitchFamily="34" charset="-122"/>
                 <a:cs typeface="Georgia" pitchFamily="34" charset="-120"/>
               </a:rPr>
-              <a:t>Teacher's quick notes</a:t>
+              <a:t>Homework</a:t>
             </a:r>
             <a:endParaRPr lang="en-US" sz="1800" dirty="0"/>
           </a:p>
@@ -2782,8 +2824,8 @@
         </p:nvSpPr>
         <p:spPr>
           <a:xfrm>
-            <a:off x="406301" y="870942"/>
-            <a:ext cx="8498026" cy="639812"/>
+            <a:off x="634901" y="883593"/>
+            <a:ext cx="8102798" cy="281880"/>
           </a:xfrm>
           <a:prstGeom prst="rect">
             <a:avLst/>
@@ -2795,17 +2837,15 @@
           <a:bodyPr wrap="square" lIns="0" tIns="0" rIns="0" bIns="0" rtlCol="0" anchor="t"/>
           <a:lstStyle/>
           <a:p>
-            <a:pPr algn="l" indent="0" marL="0">
-              <a:lnSpc>
-                <a:spcPts val="1680"/>
-              </a:lnSpc>
-              <a:spcBef>
-                <a:spcPts val="300"/>
-              </a:spcBef>
-              <a:spcAft>
-                <a:spcPts val="300"/>
-              </a:spcAft>
-              <a:buNone/>
+            <a:pPr algn="l" marL="342900" indent="-342900">
+              <a:lnSpc>
+                <a:spcPts val="1620"/>
+              </a:lnSpc>
+              <a:spcAft>
+                <a:spcPts val="300"/>
+              </a:spcAft>
+              <a:buSzPct val="100000"/>
+              <a:buChar char="•"/>
             </a:pPr>
             <a:r>
               <a:rPr lang="en-US" sz="1200" dirty="0">
@@ -2816,7 +2856,527 @@
                 <a:ea typeface="Verdana" pitchFamily="34" charset="-122"/>
                 <a:cs typeface="Verdana" pitchFamily="34" charset="-120"/>
               </a:rPr>
-              <a:t>– The breath-movement co-ordination is the actual skill. Cue: "breath leads, body follows." – Watch wrists — students with wrist issues can do this on forearms. – Some children will giggle uncontrollably at the animal sounds. Let them — it loosens the body.</a:t>
+              <a:t>5 cat-cow waves before breakfast. Make the sounds!</a:t>
+            </a:r>
+            <a:endParaRPr lang="en-US" sz="1200" dirty="0"/>
+          </a:p>
+        </p:txBody>
+      </p:sp>
+      <p:sp>
+        <p:nvSpPr>
+          <p:cNvPr id="5" name="Text 3"/>
+          <p:cNvSpPr/>
+          <p:nvPr/>
+        </p:nvSpPr>
+        <p:spPr>
+          <a:xfrm>
+            <a:off x="406301" y="4434929"/>
+            <a:ext cx="8498026" cy="213271"/>
+          </a:xfrm>
+          <a:prstGeom prst="rect">
+            <a:avLst/>
+          </a:prstGeom>
+          <a:noFill/>
+          <a:ln/>
+        </p:spPr>
+        <p:txBody>
+          <a:bodyPr wrap="square" lIns="0" tIns="0" rIns="0" bIns="0" rtlCol="0" anchor="t"/>
+          <a:lstStyle/>
+          <a:p>
+            <a:pPr algn="l" indent="0" marL="0">
+              <a:lnSpc>
+                <a:spcPts val="1680"/>
+              </a:lnSpc>
+              <a:spcBef>
+                <a:spcPts val="300"/>
+              </a:spcBef>
+              <a:spcAft>
+                <a:spcPts val="300"/>
+              </a:spcAft>
+              <a:buNone/>
+            </a:pPr>
+            <a:r>
+              <a:rPr lang="en-US" sz="1200" dirty="0">
+                <a:solidFill>
+                  <a:srgbClr val="2C2C2C"/>
+                </a:solidFill>
+                <a:latin typeface="Verdana" pitchFamily="34" charset="0"/>
+                <a:ea typeface="Verdana" pitchFamily="34" charset="-122"/>
+                <a:cs typeface="Verdana" pitchFamily="34" charset="-120"/>
+              </a:rPr>
+              <a:t>Primary ·  · IKS Curriculum</a:t>
+            </a:r>
+            <a:endParaRPr lang="en-US" sz="1200" dirty="0"/>
+          </a:p>
+        </p:txBody>
+      </p:sp>
+    </p:spTree>
+  </p:cSld>
+  <p:clrMapOvr>
+    <a:masterClrMapping/>
+  </p:clrMapOvr>
+</p:sld>
+</file>
+
+<file path=ppt/slides/slide13.xml><?xml version="1.0" encoding="utf-8"?>
+<p:sld xmlns:a="http://schemas.openxmlformats.org/drawingml/2006/main" xmlns:r="http://schemas.openxmlformats.org/officeDocument/2006/relationships" xmlns:p="http://schemas.openxmlformats.org/presentationml/2006/main">
+  <p:cSld name="Slide 13">
+    <p:bg>
+      <p:bgPr>
+        <a:solidFill>
+          <a:srgbClr val="FAF7F2"/>
+        </a:solidFill>
+      </p:bgPr>
+    </p:bg>
+    <p:spTree>
+      <p:nvGrpSpPr>
+        <p:cNvPr id="1" name=""/>
+        <p:cNvGrpSpPr/>
+        <p:nvPr/>
+      </p:nvGrpSpPr>
+      <p:grpSpPr>
+        <a:xfrm>
+          <a:off x="0" y="0"/>
+          <a:ext cx="0" cy="0"/>
+          <a:chOff x="0" y="0"/>
+          <a:chExt cx="0" cy="0"/>
+        </a:xfrm>
+      </p:grpSpPr>
+      <p:sp>
+        <p:nvSpPr>
+          <p:cNvPr id="2" name="Text 0"/>
+          <p:cNvSpPr/>
+          <p:nvPr/>
+        </p:nvSpPr>
+        <p:spPr>
+          <a:xfrm>
+            <a:off x="0" y="0"/>
+            <a:ext cx="9144000" cy="101501"/>
+          </a:xfrm>
+          <a:prstGeom prst="rect">
+            <a:avLst/>
+          </a:prstGeom>
+          <a:solidFill>
+            <a:srgbClr val="87A96B"/>
+          </a:solidFill>
+          <a:ln/>
+        </p:spPr>
+        <p:txBody>
+          <a:bodyPr wrap="square" rtlCol="0" anchor="ctr"/>
+          <a:lstStyle/>
+          <a:p>
+            <a:pPr indent="0" marL="0">
+              <a:buNone/>
+            </a:pPr>
+            <a:endParaRPr lang="en-US" dirty="0"/>
+          </a:p>
+        </p:txBody>
+      </p:sp>
+      <p:sp>
+        <p:nvSpPr>
+          <p:cNvPr id="3" name="Text 1"/>
+          <p:cNvSpPr/>
+          <p:nvPr/>
+        </p:nvSpPr>
+        <p:spPr>
+          <a:xfrm>
+            <a:off x="406301" y="457051"/>
+            <a:ext cx="8498026" cy="274290"/>
+          </a:xfrm>
+          <a:prstGeom prst="rect">
+            <a:avLst/>
+          </a:prstGeom>
+          <a:noFill/>
+          <a:ln/>
+        </p:spPr>
+        <p:txBody>
+          <a:bodyPr wrap="square" lIns="0" tIns="0" rIns="0" bIns="0" rtlCol="0" anchor="t"/>
+          <a:lstStyle/>
+          <a:p>
+            <a:pPr algn="l" indent="0" marL="0">
+              <a:lnSpc>
+                <a:spcPts val="2160"/>
+              </a:lnSpc>
+              <a:spcBef>
+                <a:spcPts val="600"/>
+              </a:spcBef>
+              <a:spcAft>
+                <a:spcPts val="800"/>
+              </a:spcAft>
+              <a:buNone/>
+            </a:pPr>
+            <a:r>
+              <a:rPr lang="en-US" sz="1800" b="1" dirty="0">
+                <a:solidFill>
+                  <a:srgbClr val="E07A5F"/>
+                </a:solidFill>
+                <a:latin typeface="Georgia" pitchFamily="34" charset="0"/>
+                <a:ea typeface="Georgia" pitchFamily="34" charset="-122"/>
+                <a:cs typeface="Georgia" pitchFamily="34" charset="-120"/>
+              </a:rPr>
+              <a:t>Differentiation</a:t>
+            </a:r>
+            <a:endParaRPr lang="en-US" sz="1800" dirty="0"/>
+          </a:p>
+        </p:txBody>
+      </p:sp>
+      <p:sp>
+        <p:nvSpPr>
+          <p:cNvPr id="4" name="Text 2"/>
+          <p:cNvSpPr/>
+          <p:nvPr/>
+        </p:nvSpPr>
+        <p:spPr>
+          <a:xfrm>
+            <a:off x="634901" y="883593"/>
+            <a:ext cx="8102798" cy="525661"/>
+          </a:xfrm>
+          <a:prstGeom prst="rect">
+            <a:avLst/>
+          </a:prstGeom>
+          <a:noFill/>
+          <a:ln/>
+        </p:spPr>
+        <p:txBody>
+          <a:bodyPr wrap="square" lIns="0" tIns="0" rIns="0" bIns="0" rtlCol="0" anchor="t"/>
+          <a:lstStyle/>
+          <a:p>
+            <a:pPr algn="l" marL="342900" indent="-342900">
+              <a:lnSpc>
+                <a:spcPts val="1620"/>
+              </a:lnSpc>
+              <a:spcAft>
+                <a:spcPts val="300"/>
+              </a:spcAft>
+              <a:buSzPct val="100000"/>
+              <a:buChar char="•"/>
+            </a:pPr>
+            <a:r>
+              <a:rPr lang="en-US" sz="1200" b="1" dirty="0">
+                <a:solidFill>
+                  <a:srgbClr val="2C2C2C"/>
+                </a:solidFill>
+                <a:latin typeface="Verdana" pitchFamily="34" charset="0"/>
+                <a:ea typeface="Verdana" pitchFamily="34" charset="-122"/>
+                <a:cs typeface="Verdana" pitchFamily="34" charset="-120"/>
+              </a:rPr>
+              <a:t>Tier up:</a:t>
+            </a:r>
+            <a:pPr algn="l" indent="0" marL="0">
+              <a:lnSpc>
+                <a:spcPts val="1620"/>
+              </a:lnSpc>
+              <a:spcAft>
+                <a:spcPts val="300"/>
+              </a:spcAft>
+              <a:buNone/>
+            </a:pPr>
+            <a:r>
+              <a:rPr lang="en-US" sz="1200" dirty="0">
+                <a:solidFill>
+                  <a:srgbClr val="2C2C2C"/>
+                </a:solidFill>
+                <a:latin typeface="Verdana" pitchFamily="34" charset="0"/>
+                <a:ea typeface="Verdana" pitchFamily="34" charset="-122"/>
+                <a:cs typeface="Verdana" pitchFamily="34" charset="-120"/>
+              </a:rPr>
+              <a:t> 10 rounds with deeper breathing.</a:t>
+            </a:r>
+            <a:endParaRPr lang="en-US" sz="1200" dirty="0"/>
+          </a:p>
+          <a:p>
+            <a:pPr algn="l" marL="342900" indent="-342900">
+              <a:lnSpc>
+                <a:spcPts val="1620"/>
+              </a:lnSpc>
+              <a:spcAft>
+                <a:spcPts val="300"/>
+              </a:spcAft>
+              <a:buSzPct val="100000"/>
+              <a:buChar char="•"/>
+            </a:pPr>
+            <a:r>
+              <a:rPr lang="en-US" sz="1200" b="1" dirty="0">
+                <a:solidFill>
+                  <a:srgbClr val="2C2C2C"/>
+                </a:solidFill>
+                <a:latin typeface="Verdana" pitchFamily="34" charset="0"/>
+                <a:ea typeface="Verdana" pitchFamily="34" charset="-122"/>
+                <a:cs typeface="Verdana" pitchFamily="34" charset="-120"/>
+              </a:rPr>
+              <a:t>Tier down:</a:t>
+            </a:r>
+            <a:pPr algn="l" indent="0" marL="0">
+              <a:lnSpc>
+                <a:spcPts val="1620"/>
+              </a:lnSpc>
+              <a:spcAft>
+                <a:spcPts val="300"/>
+              </a:spcAft>
+              <a:buNone/>
+            </a:pPr>
+            <a:r>
+              <a:rPr lang="en-US" sz="1200" dirty="0">
+                <a:solidFill>
+                  <a:srgbClr val="2C2C2C"/>
+                </a:solidFill>
+                <a:latin typeface="Verdana" pitchFamily="34" charset="0"/>
+                <a:ea typeface="Verdana" pitchFamily="34" charset="-122"/>
+                <a:cs typeface="Verdana" pitchFamily="34" charset="-120"/>
+              </a:rPr>
+              <a:t> Skip the sounds if shy. Just the movement.</a:t>
+            </a:r>
+            <a:endParaRPr lang="en-US" sz="1200" dirty="0"/>
+          </a:p>
+        </p:txBody>
+      </p:sp>
+      <p:sp>
+        <p:nvSpPr>
+          <p:cNvPr id="5" name="Text 3"/>
+          <p:cNvSpPr/>
+          <p:nvPr/>
+        </p:nvSpPr>
+        <p:spPr>
+          <a:xfrm>
+            <a:off x="406301" y="4434929"/>
+            <a:ext cx="8498026" cy="213271"/>
+          </a:xfrm>
+          <a:prstGeom prst="rect">
+            <a:avLst/>
+          </a:prstGeom>
+          <a:noFill/>
+          <a:ln/>
+        </p:spPr>
+        <p:txBody>
+          <a:bodyPr wrap="square" lIns="0" tIns="0" rIns="0" bIns="0" rtlCol="0" anchor="t"/>
+          <a:lstStyle/>
+          <a:p>
+            <a:pPr algn="l" indent="0" marL="0">
+              <a:lnSpc>
+                <a:spcPts val="1680"/>
+              </a:lnSpc>
+              <a:spcBef>
+                <a:spcPts val="300"/>
+              </a:spcBef>
+              <a:spcAft>
+                <a:spcPts val="300"/>
+              </a:spcAft>
+              <a:buNone/>
+            </a:pPr>
+            <a:r>
+              <a:rPr lang="en-US" sz="1200" dirty="0">
+                <a:solidFill>
+                  <a:srgbClr val="2C2C2C"/>
+                </a:solidFill>
+                <a:latin typeface="Verdana" pitchFamily="34" charset="0"/>
+                <a:ea typeface="Verdana" pitchFamily="34" charset="-122"/>
+                <a:cs typeface="Verdana" pitchFamily="34" charset="-120"/>
+              </a:rPr>
+              <a:t>Primary ·  · IKS Curriculum</a:t>
+            </a:r>
+            <a:endParaRPr lang="en-US" sz="1200" dirty="0"/>
+          </a:p>
+        </p:txBody>
+      </p:sp>
+    </p:spTree>
+  </p:cSld>
+  <p:clrMapOvr>
+    <a:masterClrMapping/>
+  </p:clrMapOvr>
+</p:sld>
+</file>
+
+<file path=ppt/slides/slide14.xml><?xml version="1.0" encoding="utf-8"?>
+<p:sld xmlns:a="http://schemas.openxmlformats.org/drawingml/2006/main" xmlns:r="http://schemas.openxmlformats.org/officeDocument/2006/relationships" xmlns:p="http://schemas.openxmlformats.org/presentationml/2006/main">
+  <p:cSld name="Slide 14">
+    <p:bg>
+      <p:bgPr>
+        <a:solidFill>
+          <a:srgbClr val="FAF7F2"/>
+        </a:solidFill>
+      </p:bgPr>
+    </p:bg>
+    <p:spTree>
+      <p:nvGrpSpPr>
+        <p:cNvPr id="1" name=""/>
+        <p:cNvGrpSpPr/>
+        <p:nvPr/>
+      </p:nvGrpSpPr>
+      <p:grpSpPr>
+        <a:xfrm>
+          <a:off x="0" y="0"/>
+          <a:ext cx="0" cy="0"/>
+          <a:chOff x="0" y="0"/>
+          <a:chExt cx="0" cy="0"/>
+        </a:xfrm>
+      </p:grpSpPr>
+      <p:sp>
+        <p:nvSpPr>
+          <p:cNvPr id="2" name="Text 0"/>
+          <p:cNvSpPr/>
+          <p:nvPr/>
+        </p:nvSpPr>
+        <p:spPr>
+          <a:xfrm>
+            <a:off x="0" y="0"/>
+            <a:ext cx="9144000" cy="101501"/>
+          </a:xfrm>
+          <a:prstGeom prst="rect">
+            <a:avLst/>
+          </a:prstGeom>
+          <a:solidFill>
+            <a:srgbClr val="87A96B"/>
+          </a:solidFill>
+          <a:ln/>
+        </p:spPr>
+        <p:txBody>
+          <a:bodyPr wrap="square" rtlCol="0" anchor="ctr"/>
+          <a:lstStyle/>
+          <a:p>
+            <a:pPr indent="0" marL="0">
+              <a:buNone/>
+            </a:pPr>
+            <a:endParaRPr lang="en-US" dirty="0"/>
+          </a:p>
+        </p:txBody>
+      </p:sp>
+      <p:sp>
+        <p:nvSpPr>
+          <p:cNvPr id="3" name="Text 1"/>
+          <p:cNvSpPr/>
+          <p:nvPr/>
+        </p:nvSpPr>
+        <p:spPr>
+          <a:xfrm>
+            <a:off x="406301" y="457051"/>
+            <a:ext cx="8498026" cy="274290"/>
+          </a:xfrm>
+          <a:prstGeom prst="rect">
+            <a:avLst/>
+          </a:prstGeom>
+          <a:noFill/>
+          <a:ln/>
+        </p:spPr>
+        <p:txBody>
+          <a:bodyPr wrap="square" lIns="0" tIns="0" rIns="0" bIns="0" rtlCol="0" anchor="t"/>
+          <a:lstStyle/>
+          <a:p>
+            <a:pPr algn="l" indent="0" marL="0">
+              <a:lnSpc>
+                <a:spcPts val="2160"/>
+              </a:lnSpc>
+              <a:spcBef>
+                <a:spcPts val="600"/>
+              </a:spcBef>
+              <a:spcAft>
+                <a:spcPts val="800"/>
+              </a:spcAft>
+              <a:buNone/>
+            </a:pPr>
+            <a:r>
+              <a:rPr lang="en-US" sz="1800" b="1" dirty="0">
+                <a:solidFill>
+                  <a:srgbClr val="E07A5F"/>
+                </a:solidFill>
+                <a:latin typeface="Georgia" pitchFamily="34" charset="0"/>
+                <a:ea typeface="Georgia" pitchFamily="34" charset="-122"/>
+                <a:cs typeface="Georgia" pitchFamily="34" charset="-120"/>
+              </a:rPr>
+              <a:t>Teacher's quick notes</a:t>
+            </a:r>
+            <a:endParaRPr lang="en-US" sz="1800" dirty="0"/>
+          </a:p>
+        </p:txBody>
+      </p:sp>
+      <p:sp>
+        <p:nvSpPr>
+          <p:cNvPr id="4" name="Text 2"/>
+          <p:cNvSpPr/>
+          <p:nvPr/>
+        </p:nvSpPr>
+        <p:spPr>
+          <a:xfrm>
+            <a:off x="634901" y="883593"/>
+            <a:ext cx="8102798" cy="769441"/>
+          </a:xfrm>
+          <a:prstGeom prst="rect">
+            <a:avLst/>
+          </a:prstGeom>
+          <a:noFill/>
+          <a:ln/>
+        </p:spPr>
+        <p:txBody>
+          <a:bodyPr wrap="square" lIns="0" tIns="0" rIns="0" bIns="0" rtlCol="0" anchor="t"/>
+          <a:lstStyle/>
+          <a:p>
+            <a:pPr algn="l" marL="342900" indent="-342900">
+              <a:lnSpc>
+                <a:spcPts val="1620"/>
+              </a:lnSpc>
+              <a:spcAft>
+                <a:spcPts val="300"/>
+              </a:spcAft>
+              <a:buSzPct val="100000"/>
+              <a:buChar char="•"/>
+            </a:pPr>
+            <a:r>
+              <a:rPr lang="en-US" sz="1200" dirty="0">
+                <a:solidFill>
+                  <a:srgbClr val="2C2C2C"/>
+                </a:solidFill>
+                <a:latin typeface="Verdana" pitchFamily="34" charset="0"/>
+                <a:ea typeface="Verdana" pitchFamily="34" charset="-122"/>
+                <a:cs typeface="Verdana" pitchFamily="34" charset="-120"/>
+              </a:rPr>
+              <a:t>The breath-movement co-ordination is the actual skill. Cue: "breath leads, body follows."</a:t>
+            </a:r>
+            <a:endParaRPr lang="en-US" sz="1200" dirty="0"/>
+          </a:p>
+          <a:p>
+            <a:pPr algn="l" marL="342900" indent="-342900">
+              <a:lnSpc>
+                <a:spcPts val="1620"/>
+              </a:lnSpc>
+              <a:spcAft>
+                <a:spcPts val="300"/>
+              </a:spcAft>
+              <a:buSzPct val="100000"/>
+              <a:buChar char="•"/>
+            </a:pPr>
+            <a:r>
+              <a:rPr lang="en-US" sz="1200" dirty="0">
+                <a:solidFill>
+                  <a:srgbClr val="2C2C2C"/>
+                </a:solidFill>
+                <a:latin typeface="Verdana" pitchFamily="34" charset="0"/>
+                <a:ea typeface="Verdana" pitchFamily="34" charset="-122"/>
+                <a:cs typeface="Verdana" pitchFamily="34" charset="-120"/>
+              </a:rPr>
+              <a:t>Watch wrists — students with wrist issues can do this on forearms.</a:t>
+            </a:r>
+            <a:endParaRPr lang="en-US" sz="1200" dirty="0"/>
+          </a:p>
+          <a:p>
+            <a:pPr algn="l" marL="342900" indent="-342900">
+              <a:lnSpc>
+                <a:spcPts val="1620"/>
+              </a:lnSpc>
+              <a:spcAft>
+                <a:spcPts val="300"/>
+              </a:spcAft>
+              <a:buSzPct val="100000"/>
+              <a:buChar char="•"/>
+            </a:pPr>
+            <a:r>
+              <a:rPr lang="en-US" sz="1200" dirty="0">
+                <a:solidFill>
+                  <a:srgbClr val="2C2C2C"/>
+                </a:solidFill>
+                <a:latin typeface="Verdana" pitchFamily="34" charset="0"/>
+                <a:ea typeface="Verdana" pitchFamily="34" charset="-122"/>
+                <a:cs typeface="Verdana" pitchFamily="34" charset="-120"/>
+              </a:rPr>
+              <a:t>Some children will giggle uncontrollably at the animal sounds. Let them — it loosens the body.</a:t>
             </a:r>
             <a:endParaRPr lang="en-US" sz="1200" dirty="0"/>
           </a:p>
@@ -2974,7 +3534,7 @@
                 <a:ea typeface="Georgia" pitchFamily="34" charset="-122"/>
                 <a:cs typeface="Georgia" pitchFamily="34" charset="-120"/>
               </a:rPr>
-              <a:t>Materials</a:t>
+              <a:t>Goal</a:t>
             </a:r>
             <a:endParaRPr lang="en-US" sz="1800" dirty="0"/>
           </a:p>
@@ -3022,7 +3582,7 @@
                 <a:ea typeface="Verdana" pitchFamily="34" charset="-122"/>
                 <a:cs typeface="Verdana" pitchFamily="34" charset="-120"/>
               </a:rPr>
-              <a:t>– Mats – Pictures of a cat (arched back) and a cow (sagging back)</a:t>
+              <a:t>Children do the cat-cow spine wave with breath co-ordination.</a:t>
             </a:r>
             <a:endParaRPr lang="en-US" sz="1200" dirty="0"/>
           </a:p>
@@ -3180,7 +3740,7 @@
                 <a:ea typeface="Georgia" pitchFamily="34" charset="-122"/>
                 <a:cs typeface="Georgia" pitchFamily="34" charset="-120"/>
               </a:rPr>
-              <a:t>The flow</a:t>
+              <a:t>Materials</a:t>
             </a:r>
             <a:endParaRPr lang="en-US" sz="1800" dirty="0"/>
           </a:p>
@@ -3189,6 +3749,76 @@
       <p:sp>
         <p:nvSpPr>
           <p:cNvPr id="4" name="Text 2"/>
+          <p:cNvSpPr/>
+          <p:nvPr/>
+        </p:nvSpPr>
+        <p:spPr>
+          <a:xfrm>
+            <a:off x="634901" y="883593"/>
+            <a:ext cx="8102798" cy="525661"/>
+          </a:xfrm>
+          <a:prstGeom prst="rect">
+            <a:avLst/>
+          </a:prstGeom>
+          <a:noFill/>
+          <a:ln/>
+        </p:spPr>
+        <p:txBody>
+          <a:bodyPr wrap="square" lIns="0" tIns="0" rIns="0" bIns="0" rtlCol="0" anchor="t"/>
+          <a:lstStyle/>
+          <a:p>
+            <a:pPr algn="l" marL="342900" indent="-342900">
+              <a:lnSpc>
+                <a:spcPts val="1620"/>
+              </a:lnSpc>
+              <a:spcAft>
+                <a:spcPts val="300"/>
+              </a:spcAft>
+              <a:buSzPct val="100000"/>
+              <a:buChar char="•"/>
+            </a:pPr>
+            <a:r>
+              <a:rPr lang="en-US" sz="1200" dirty="0">
+                <a:solidFill>
+                  <a:srgbClr val="2C2C2C"/>
+                </a:solidFill>
+                <a:latin typeface="Verdana" pitchFamily="34" charset="0"/>
+                <a:ea typeface="Verdana" pitchFamily="34" charset="-122"/>
+                <a:cs typeface="Verdana" pitchFamily="34" charset="-120"/>
+              </a:rPr>
+              <a:t>Mats</a:t>
+            </a:r>
+            <a:endParaRPr lang="en-US" sz="1200" dirty="0"/>
+          </a:p>
+          <a:p>
+            <a:pPr algn="l" marL="342900" indent="-342900">
+              <a:lnSpc>
+                <a:spcPts val="1620"/>
+              </a:lnSpc>
+              <a:spcAft>
+                <a:spcPts val="300"/>
+              </a:spcAft>
+              <a:buSzPct val="100000"/>
+              <a:buChar char="•"/>
+            </a:pPr>
+            <a:r>
+              <a:rPr lang="en-US" sz="1200" dirty="0">
+                <a:solidFill>
+                  <a:srgbClr val="2C2C2C"/>
+                </a:solidFill>
+                <a:latin typeface="Verdana" pitchFamily="34" charset="0"/>
+                <a:ea typeface="Verdana" pitchFamily="34" charset="-122"/>
+                <a:cs typeface="Verdana" pitchFamily="34" charset="-120"/>
+              </a:rPr>
+              <a:t>Pictures of a cat (arched back) and a cow (sagging back)</a:t>
+            </a:r>
+            <a:endParaRPr lang="en-US" sz="1200" dirty="0"/>
+          </a:p>
+        </p:txBody>
+      </p:sp>
+      <p:sp>
+        <p:nvSpPr>
+          <p:cNvPr id="5" name="Text 3"/>
           <p:cNvSpPr/>
           <p:nvPr/>
         </p:nvSpPr>
@@ -3338,7 +3968,7 @@
                 <a:ea typeface="Georgia" pitchFamily="34" charset="-122"/>
                 <a:cs typeface="Georgia" pitchFamily="34" charset="-120"/>
               </a:rPr>
-              <a:t>Settle + opening tāḍāsana (3 min)</a:t>
+              <a:t>The flow</a:t>
             </a:r>
             <a:endParaRPr lang="en-US" sz="1800" dirty="0"/>
           </a:p>
@@ -3496,7 +4126,7 @@
                 <a:ea typeface="Georgia" pitchFamily="34" charset="-122"/>
                 <a:cs typeface="Georgia" pitchFamily="34" charset="-120"/>
               </a:rPr>
-              <a:t>Story (5 min)</a:t>
+              <a:t>Settle + opening tāḍāsana (3 min)</a:t>
             </a:r>
             <a:endParaRPr lang="en-US" sz="1800" dirty="0"/>
           </a:p>
@@ -3505,194 +4135,6 @@
       <p:sp>
         <p:nvSpPr>
           <p:cNvPr id="4" name="Text 2"/>
-          <p:cNvSpPr/>
-          <p:nvPr/>
-        </p:nvSpPr>
-        <p:spPr>
-          <a:xfrm>
-            <a:off x="406301" y="870942"/>
-            <a:ext cx="8498026" cy="426541"/>
-          </a:xfrm>
-          <a:prstGeom prst="rect">
-            <a:avLst/>
-          </a:prstGeom>
-          <a:noFill/>
-          <a:ln/>
-        </p:spPr>
-        <p:txBody>
-          <a:bodyPr wrap="square" lIns="0" tIns="0" rIns="0" bIns="0" rtlCol="0" anchor="t"/>
-          <a:lstStyle/>
-          <a:p>
-            <a:pPr algn="l" indent="0" marL="0">
-              <a:lnSpc>
-                <a:spcPts val="1680"/>
-              </a:lnSpc>
-              <a:spcBef>
-                <a:spcPts val="300"/>
-              </a:spcBef>
-              <a:spcAft>
-                <a:spcPts val="300"/>
-              </a:spcAft>
-              <a:buNone/>
-            </a:pPr>
-            <a:r>
-              <a:rPr lang="en-US" sz="1200" i="1" dirty="0">
-                <a:solidFill>
-                  <a:srgbClr val="2C2C2C"/>
-                </a:solidFill>
-                <a:latin typeface="Verdana" pitchFamily="34" charset="0"/>
-                <a:ea typeface="Verdana" pitchFamily="34" charset="-122"/>
-                <a:cs typeface="Verdana" pitchFamily="34" charset="-120"/>
-              </a:rPr>
-              <a:t>"Today we have TWO poses that go together — </a:t>
-            </a:r>
-            <a:pPr algn="l" indent="0" marL="0">
-              <a:lnSpc>
-                <a:spcPts val="1680"/>
-              </a:lnSpc>
-              <a:spcBef>
-                <a:spcPts val="300"/>
-              </a:spcBef>
-              <a:spcAft>
-                <a:spcPts val="300"/>
-              </a:spcAft>
-              <a:buNone/>
-            </a:pPr>
-            <a:r>
-              <a:rPr lang="en-US" sz="1200" b="1" i="1" dirty="0">
-                <a:solidFill>
-                  <a:srgbClr val="2C2C2C"/>
-                </a:solidFill>
-                <a:latin typeface="Verdana" pitchFamily="34" charset="0"/>
-                <a:ea typeface="Verdana" pitchFamily="34" charset="-122"/>
-                <a:cs typeface="Verdana" pitchFamily="34" charset="-120"/>
-              </a:rPr>
-              <a:t>mārjārī</a:t>
-            </a:r>
-            <a:pPr algn="l" indent="0" marL="0">
-              <a:lnSpc>
-                <a:spcPts val="1680"/>
-              </a:lnSpc>
-              <a:spcBef>
-                <a:spcPts val="300"/>
-              </a:spcBef>
-              <a:spcAft>
-                <a:spcPts val="300"/>
-              </a:spcAft>
-              <a:buNone/>
-            </a:pPr>
-            <a:r>
-              <a:rPr lang="en-US" sz="1200" i="1" dirty="0">
-                <a:solidFill>
-                  <a:srgbClr val="2C2C2C"/>
-                </a:solidFill>
-                <a:latin typeface="Verdana" pitchFamily="34" charset="0"/>
-                <a:ea typeface="Verdana" pitchFamily="34" charset="-122"/>
-                <a:cs typeface="Verdana" pitchFamily="34" charset="-120"/>
-              </a:rPr>
-              <a:t> (cat) and </a:t>
-            </a:r>
-            <a:pPr algn="l" indent="0" marL="0">
-              <a:lnSpc>
-                <a:spcPts val="1680"/>
-              </a:lnSpc>
-              <a:spcBef>
-                <a:spcPts val="300"/>
-              </a:spcBef>
-              <a:spcAft>
-                <a:spcPts val="300"/>
-              </a:spcAft>
-              <a:buNone/>
-            </a:pPr>
-            <a:r>
-              <a:rPr lang="en-US" sz="1200" b="1" i="1" dirty="0">
-                <a:solidFill>
-                  <a:srgbClr val="2C2C2C"/>
-                </a:solidFill>
-                <a:latin typeface="Verdana" pitchFamily="34" charset="0"/>
-                <a:ea typeface="Verdana" pitchFamily="34" charset="-122"/>
-                <a:cs typeface="Verdana" pitchFamily="34" charset="-120"/>
-              </a:rPr>
-              <a:t>bidalāsana</a:t>
-            </a:r>
-            <a:pPr algn="l" indent="0" marL="0">
-              <a:lnSpc>
-                <a:spcPts val="1680"/>
-              </a:lnSpc>
-              <a:spcBef>
-                <a:spcPts val="300"/>
-              </a:spcBef>
-              <a:spcAft>
-                <a:spcPts val="300"/>
-              </a:spcAft>
-              <a:buNone/>
-            </a:pPr>
-            <a:r>
-              <a:rPr lang="en-US" sz="1200" i="1" dirty="0">
-                <a:solidFill>
-                  <a:srgbClr val="2C2C2C"/>
-                </a:solidFill>
-                <a:latin typeface="Verdana" pitchFamily="34" charset="0"/>
-                <a:ea typeface="Verdana" pitchFamily="34" charset="-122"/>
-                <a:cs typeface="Verdana" pitchFamily="34" charset="-120"/>
-              </a:rPr>
-              <a:t> (cow). We flow between them like waves."</a:t>
-            </a:r>
-            <a:endParaRPr lang="en-US" sz="1200" dirty="0"/>
-          </a:p>
-        </p:txBody>
-      </p:sp>
-      <p:sp>
-        <p:nvSpPr>
-          <p:cNvPr id="5" name="Text 3"/>
-          <p:cNvSpPr/>
-          <p:nvPr/>
-        </p:nvSpPr>
-        <p:spPr>
-          <a:xfrm>
-            <a:off x="406301" y="1373684"/>
-            <a:ext cx="8498026" cy="213271"/>
-          </a:xfrm>
-          <a:prstGeom prst="rect">
-            <a:avLst/>
-          </a:prstGeom>
-          <a:noFill/>
-          <a:ln/>
-        </p:spPr>
-        <p:txBody>
-          <a:bodyPr wrap="square" lIns="0" tIns="0" rIns="0" bIns="0" rtlCol="0" anchor="t"/>
-          <a:lstStyle/>
-          <a:p>
-            <a:pPr algn="l" indent="0" marL="0">
-              <a:lnSpc>
-                <a:spcPts val="1680"/>
-              </a:lnSpc>
-              <a:spcBef>
-                <a:spcPts val="300"/>
-              </a:spcBef>
-              <a:spcAft>
-                <a:spcPts val="300"/>
-              </a:spcAft>
-              <a:buNone/>
-            </a:pPr>
-            <a:r>
-              <a:rPr lang="en-US" sz="1200" dirty="0">
-                <a:solidFill>
-                  <a:srgbClr val="2C2C2C"/>
-                </a:solidFill>
-                <a:latin typeface="Verdana" pitchFamily="34" charset="0"/>
-                <a:ea typeface="Verdana" pitchFamily="34" charset="-122"/>
-                <a:cs typeface="Verdana" pitchFamily="34" charset="-120"/>
-              </a:rPr>
-              <a:t>Show pictures: cat with arched back, cow with belly down.</a:t>
-            </a:r>
-            <a:endParaRPr lang="en-US" sz="1200" dirty="0"/>
-          </a:p>
-        </p:txBody>
-      </p:sp>
-      <p:sp>
-        <p:nvSpPr>
-          <p:cNvPr id="6" name="Text 4"/>
           <p:cNvSpPr/>
           <p:nvPr/>
         </p:nvSpPr>
@@ -3842,7 +4284,7 @@
                 <a:ea typeface="Georgia" pitchFamily="34" charset="-122"/>
                 <a:cs typeface="Georgia" pitchFamily="34" charset="-120"/>
               </a:rPr>
-              <a:t>Cat-cow practice (15 min)</a:t>
+              <a:t>Story (5 min)</a:t>
             </a:r>
             <a:endParaRPr lang="en-US" sz="1800" dirty="0"/>
           </a:p>
@@ -3856,8 +4298,8 @@
         </p:nvSpPr>
         <p:spPr>
           <a:xfrm>
-            <a:off x="634901" y="883593"/>
-            <a:ext cx="8102798" cy="1218902"/>
+            <a:off x="406301" y="870942"/>
+            <a:ext cx="8498026" cy="426541"/>
           </a:xfrm>
           <a:prstGeom prst="rect">
             <a:avLst/>
@@ -3869,15 +4311,17 @@
           <a:bodyPr wrap="square" lIns="0" tIns="0" rIns="0" bIns="0" rtlCol="0" anchor="t"/>
           <a:lstStyle/>
           <a:p>
-            <a:pPr algn="l" marL="342900" indent="-342900">
-              <a:lnSpc>
-                <a:spcPts val="1620"/>
-              </a:lnSpc>
-              <a:spcAft>
-                <a:spcPts val="300"/>
-              </a:spcAft>
-              <a:buSzPct val="100000"/>
-              <a:buChar char="•"/>
+            <a:pPr algn="l" indent="0" marL="0">
+              <a:lnSpc>
+                <a:spcPts val="1680"/>
+              </a:lnSpc>
+              <a:spcBef>
+                <a:spcPts val="300"/>
+              </a:spcBef>
+              <a:spcAft>
+                <a:spcPts val="300"/>
+              </a:spcAft>
+              <a:buNone/>
             </a:pPr>
             <a:r>
               <a:rPr lang="en-US" sz="1200" i="1" dirty="0">
@@ -3888,23 +4332,22 @@
                 <a:ea typeface="Verdana" pitchFamily="34" charset="-122"/>
                 <a:cs typeface="Verdana" pitchFamily="34" charset="-120"/>
               </a:rPr>
-              <a:t>"Come to your hands and knees on your mat. Hands under shoulders, knees under hips."</a:t>
-            </a:r>
-            <a:endParaRPr lang="en-US" sz="1200" dirty="0"/>
-          </a:p>
-          <a:p>
-            <a:pPr algn="l" marL="342900" indent="-342900">
-              <a:lnSpc>
-                <a:spcPts val="1620"/>
-              </a:lnSpc>
-              <a:spcAft>
-                <a:spcPts val="300"/>
-              </a:spcAft>
-              <a:buSzPct val="100000"/>
-              <a:buChar char="•"/>
-            </a:pPr>
-            <a:r>
-              <a:rPr lang="en-US" sz="1200" i="1" dirty="0">
+              <a:t>"Today we have TWO poses that go together — </a:t>
+            </a:r>
+            <a:pPr algn="l" indent="0" marL="0">
+              <a:lnSpc>
+                <a:spcPts val="1680"/>
+              </a:lnSpc>
+              <a:spcBef>
+                <a:spcPts val="300"/>
+              </a:spcBef>
+              <a:spcAft>
+                <a:spcPts val="300"/>
+              </a:spcAft>
+              <a:buNone/>
+            </a:pPr>
+            <a:r>
+              <a:rPr lang="en-US" sz="1200" b="1" i="1" dirty="0">
                 <a:solidFill>
                   <a:srgbClr val="2C2C2C"/>
                 </a:solidFill>
@@ -3912,20 +4355,19 @@
                 <a:ea typeface="Verdana" pitchFamily="34" charset="-122"/>
                 <a:cs typeface="Verdana" pitchFamily="34" charset="-120"/>
               </a:rPr>
-              <a:t>"COW: as you BREATHE IN, drop your belly. Lift your head and tailbone. Look slightly up. Moooo if you like."</a:t>
-            </a:r>
-            <a:endParaRPr lang="en-US" sz="1200" dirty="0"/>
-          </a:p>
-          <a:p>
-            <a:pPr algn="l" marL="342900" indent="-342900">
-              <a:lnSpc>
-                <a:spcPts val="1620"/>
-              </a:lnSpc>
-              <a:spcAft>
-                <a:spcPts val="300"/>
-              </a:spcAft>
-              <a:buSzPct val="100000"/>
-              <a:buChar char="•"/>
+              <a:t>mārjārī</a:t>
+            </a:r>
+            <a:pPr algn="l" indent="0" marL="0">
+              <a:lnSpc>
+                <a:spcPts val="1680"/>
+              </a:lnSpc>
+              <a:spcBef>
+                <a:spcPts val="300"/>
+              </a:spcBef>
+              <a:spcAft>
+                <a:spcPts val="300"/>
+              </a:spcAft>
+              <a:buNone/>
             </a:pPr>
             <a:r>
               <a:rPr lang="en-US" sz="1200" i="1" dirty="0">
@@ -3936,23 +4378,22 @@
                 <a:ea typeface="Verdana" pitchFamily="34" charset="-122"/>
                 <a:cs typeface="Verdana" pitchFamily="34" charset="-120"/>
               </a:rPr>
-              <a:t>"CAT: as you BREATHE OUT, round your back like a scared cat. Tuck your chin. Meow!"</a:t>
-            </a:r>
-            <a:endParaRPr lang="en-US" sz="1200" dirty="0"/>
-          </a:p>
-          <a:p>
-            <a:pPr algn="l" marL="342900" indent="-342900">
-              <a:lnSpc>
-                <a:spcPts val="1620"/>
-              </a:lnSpc>
-              <a:spcAft>
-                <a:spcPts val="300"/>
-              </a:spcAft>
-              <a:buSzPct val="100000"/>
-              <a:buChar char="•"/>
-            </a:pPr>
-            <a:r>
-              <a:rPr lang="en-US" sz="1200" i="1" dirty="0">
+              <a:t> (cat) and </a:t>
+            </a:r>
+            <a:pPr algn="l" indent="0" marL="0">
+              <a:lnSpc>
+                <a:spcPts val="1680"/>
+              </a:lnSpc>
+              <a:spcBef>
+                <a:spcPts val="300"/>
+              </a:spcBef>
+              <a:spcAft>
+                <a:spcPts val="300"/>
+              </a:spcAft>
+              <a:buNone/>
+            </a:pPr>
+            <a:r>
+              <a:rPr lang="en-US" sz="1200" b="1" i="1" dirty="0">
                 <a:solidFill>
                   <a:srgbClr val="2C2C2C"/>
                 </a:solidFill>
@@ -3960,7 +4401,30 @@
                 <a:ea typeface="Verdana" pitchFamily="34" charset="-122"/>
                 <a:cs typeface="Verdana" pitchFamily="34" charset="-120"/>
               </a:rPr>
-              <a:t>"COW (inhale). CAT (exhale). COW. CAT."</a:t>
+              <a:t>bidalāsana</a:t>
+            </a:r>
+            <a:pPr algn="l" indent="0" marL="0">
+              <a:lnSpc>
+                <a:spcPts val="1680"/>
+              </a:lnSpc>
+              <a:spcBef>
+                <a:spcPts val="300"/>
+              </a:spcBef>
+              <a:spcAft>
+                <a:spcPts val="300"/>
+              </a:spcAft>
+              <a:buNone/>
+            </a:pPr>
+            <a:r>
+              <a:rPr lang="en-US" sz="1200" i="1" dirty="0">
+                <a:solidFill>
+                  <a:srgbClr val="2C2C2C"/>
+                </a:solidFill>
+                <a:latin typeface="Verdana" pitchFamily="34" charset="0"/>
+                <a:ea typeface="Verdana" pitchFamily="34" charset="-122"/>
+                <a:cs typeface="Verdana" pitchFamily="34" charset="-120"/>
+              </a:rPr>
+              <a:t> (cow). We flow between them like waves."</a:t>
             </a:r>
             <a:endParaRPr lang="en-US" sz="1200" dirty="0"/>
           </a:p>
@@ -3974,7 +4438,7 @@
         </p:nvSpPr>
         <p:spPr>
           <a:xfrm>
-            <a:off x="406301" y="2191345"/>
+            <a:off x="406301" y="1373684"/>
             <a:ext cx="8498026" cy="213271"/>
           </a:xfrm>
           <a:prstGeom prst="rect">
@@ -4008,7 +4472,7 @@
                 <a:ea typeface="Verdana" pitchFamily="34" charset="-122"/>
                 <a:cs typeface="Verdana" pitchFamily="34" charset="-120"/>
               </a:rPr>
-              <a:t>Do 5 slow rounds. Then 5 more, focusing on the breath.</a:t>
+              <a:t>Show pictures: cat with arched back, cow with belly down.</a:t>
             </a:r>
             <a:endParaRPr lang="en-US" sz="1200" dirty="0"/>
           </a:p>
@@ -4166,7 +4630,7 @@
                 <a:ea typeface="Georgia" pitchFamily="34" charset="-122"/>
                 <a:cs typeface="Georgia" pitchFamily="34" charset="-120"/>
               </a:rPr>
-              <a:t>Animal sound bonus (4 min)</a:t>
+              <a:t>Cat-cow practice (15 min)</a:t>
             </a:r>
             <a:endParaRPr lang="en-US" sz="1800" dirty="0"/>
           </a:p>
@@ -4180,8 +4644,8 @@
         </p:nvSpPr>
         <p:spPr>
           <a:xfrm>
-            <a:off x="406301" y="870942"/>
-            <a:ext cx="8498026" cy="213271"/>
+            <a:off x="634901" y="883593"/>
+            <a:ext cx="8102798" cy="1218902"/>
           </a:xfrm>
           <a:prstGeom prst="rect">
             <a:avLst/>
@@ -4193,17 +4657,15 @@
           <a:bodyPr wrap="square" lIns="0" tIns="0" rIns="0" bIns="0" rtlCol="0" anchor="t"/>
           <a:lstStyle/>
           <a:p>
-            <a:pPr algn="l" indent="0" marL="0">
-              <a:lnSpc>
-                <a:spcPts val="1680"/>
-              </a:lnSpc>
-              <a:spcBef>
-                <a:spcPts val="300"/>
-              </a:spcBef>
-              <a:spcAft>
-                <a:spcPts val="300"/>
-              </a:spcAft>
-              <a:buNone/>
+            <a:pPr algn="l" marL="342900" indent="-342900">
+              <a:lnSpc>
+                <a:spcPts val="1620"/>
+              </a:lnSpc>
+              <a:spcAft>
+                <a:spcPts val="300"/>
+              </a:spcAft>
+              <a:buSzPct val="100000"/>
+              <a:buChar char="•"/>
             </a:pPr>
             <a:r>
               <a:rPr lang="en-US" sz="1200" i="1" dirty="0">
@@ -4214,7 +4676,79 @@
                 <a:ea typeface="Verdana" pitchFamily="34" charset="-122"/>
                 <a:cs typeface="Verdana" pitchFamily="34" charset="-120"/>
               </a:rPr>
-              <a:t>"Animal sounds are allowed. Cows say 'moo.' Cats say 'meow.' Try making the sound on each pose."</a:t>
+              <a:t>"Come to your hands and knees on your mat. Hands under shoulders, knees under hips."</a:t>
+            </a:r>
+            <a:endParaRPr lang="en-US" sz="1200" dirty="0"/>
+          </a:p>
+          <a:p>
+            <a:pPr algn="l" marL="342900" indent="-342900">
+              <a:lnSpc>
+                <a:spcPts val="1620"/>
+              </a:lnSpc>
+              <a:spcAft>
+                <a:spcPts val="300"/>
+              </a:spcAft>
+              <a:buSzPct val="100000"/>
+              <a:buChar char="•"/>
+            </a:pPr>
+            <a:r>
+              <a:rPr lang="en-US" sz="1200" i="1" dirty="0">
+                <a:solidFill>
+                  <a:srgbClr val="2C2C2C"/>
+                </a:solidFill>
+                <a:latin typeface="Verdana" pitchFamily="34" charset="0"/>
+                <a:ea typeface="Verdana" pitchFamily="34" charset="-122"/>
+                <a:cs typeface="Verdana" pitchFamily="34" charset="-120"/>
+              </a:rPr>
+              <a:t>"COW: as you BREATHE IN, drop your belly. Lift your head and tailbone. Look slightly up. Moooo if you like."</a:t>
+            </a:r>
+            <a:endParaRPr lang="en-US" sz="1200" dirty="0"/>
+          </a:p>
+          <a:p>
+            <a:pPr algn="l" marL="342900" indent="-342900">
+              <a:lnSpc>
+                <a:spcPts val="1620"/>
+              </a:lnSpc>
+              <a:spcAft>
+                <a:spcPts val="300"/>
+              </a:spcAft>
+              <a:buSzPct val="100000"/>
+              <a:buChar char="•"/>
+            </a:pPr>
+            <a:r>
+              <a:rPr lang="en-US" sz="1200" i="1" dirty="0">
+                <a:solidFill>
+                  <a:srgbClr val="2C2C2C"/>
+                </a:solidFill>
+                <a:latin typeface="Verdana" pitchFamily="34" charset="0"/>
+                <a:ea typeface="Verdana" pitchFamily="34" charset="-122"/>
+                <a:cs typeface="Verdana" pitchFamily="34" charset="-120"/>
+              </a:rPr>
+              <a:t>"CAT: as you BREATHE OUT, round your back like a scared cat. Tuck your chin. Meow!"</a:t>
+            </a:r>
+            <a:endParaRPr lang="en-US" sz="1200" dirty="0"/>
+          </a:p>
+          <a:p>
+            <a:pPr algn="l" marL="342900" indent="-342900">
+              <a:lnSpc>
+                <a:spcPts val="1620"/>
+              </a:lnSpc>
+              <a:spcAft>
+                <a:spcPts val="300"/>
+              </a:spcAft>
+              <a:buSzPct val="100000"/>
+              <a:buChar char="•"/>
+            </a:pPr>
+            <a:r>
+              <a:rPr lang="en-US" sz="1200" i="1" dirty="0">
+                <a:solidFill>
+                  <a:srgbClr val="2C2C2C"/>
+                </a:solidFill>
+                <a:latin typeface="Verdana" pitchFamily="34" charset="0"/>
+                <a:ea typeface="Verdana" pitchFamily="34" charset="-122"/>
+                <a:cs typeface="Verdana" pitchFamily="34" charset="-120"/>
+              </a:rPr>
+              <a:t>"COW (inhale). CAT (exhale). COW. CAT."</a:t>
             </a:r>
             <a:endParaRPr lang="en-US" sz="1200" dirty="0"/>
           </a:p>
@@ -4372,7 +4906,7 @@
                 <a:ea typeface="Georgia" pitchFamily="34" charset="-122"/>
                 <a:cs typeface="Georgia" pitchFamily="34" charset="-120"/>
               </a:rPr>
-              <a:t>Reflection (3 min)</a:t>
+              <a:t>Cat-cow practice (15 min) (cont.)</a:t>
             </a:r>
             <a:endParaRPr lang="en-US" sz="1800" dirty="0"/>
           </a:p>
@@ -4386,8 +4920,8 @@
         </p:nvSpPr>
         <p:spPr>
           <a:xfrm>
-            <a:off x="634901" y="883593"/>
-            <a:ext cx="8102798" cy="525661"/>
+            <a:off x="406301" y="870942"/>
+            <a:ext cx="8498026" cy="213271"/>
           </a:xfrm>
           <a:prstGeom prst="rect">
             <a:avLst/>
@@ -4399,18 +4933,20 @@
           <a:bodyPr wrap="square" lIns="0" tIns="0" rIns="0" bIns="0" rtlCol="0" anchor="t"/>
           <a:lstStyle/>
           <a:p>
-            <a:pPr algn="l" marL="342900" indent="-342900">
-              <a:lnSpc>
-                <a:spcPts val="1620"/>
-              </a:lnSpc>
-              <a:spcAft>
-                <a:spcPts val="300"/>
-              </a:spcAft>
-              <a:buSzPct val="100000"/>
-              <a:buChar char="•"/>
-            </a:pPr>
-            <a:r>
-              <a:rPr lang="en-US" sz="1200" i="1" dirty="0">
+            <a:pPr algn="l" indent="0" marL="0">
+              <a:lnSpc>
+                <a:spcPts val="1680"/>
+              </a:lnSpc>
+              <a:spcBef>
+                <a:spcPts val="300"/>
+              </a:spcBef>
+              <a:spcAft>
+                <a:spcPts val="300"/>
+              </a:spcAft>
+              <a:buNone/>
+            </a:pPr>
+            <a:r>
+              <a:rPr lang="en-US" sz="1200" dirty="0">
                 <a:solidFill>
                   <a:srgbClr val="2C2C2C"/>
                 </a:solidFill>
@@ -4418,31 +4954,7 @@
                 <a:ea typeface="Verdana" pitchFamily="34" charset="-122"/>
                 <a:cs typeface="Verdana" pitchFamily="34" charset="-120"/>
               </a:rPr>
-              <a:t>"Which felt better — cat or cow?"</a:t>
-            </a:r>
-            <a:endParaRPr lang="en-US" sz="1200" dirty="0"/>
-          </a:p>
-          <a:p>
-            <a:pPr algn="l" marL="342900" indent="-342900">
-              <a:lnSpc>
-                <a:spcPts val="1620"/>
-              </a:lnSpc>
-              <a:spcAft>
-                <a:spcPts val="300"/>
-              </a:spcAft>
-              <a:buSzPct val="100000"/>
-              <a:buChar char="•"/>
-            </a:pPr>
-            <a:r>
-              <a:rPr lang="en-US" sz="1200" i="1" dirty="0">
-                <a:solidFill>
-                  <a:srgbClr val="2C2C2C"/>
-                </a:solidFill>
-                <a:latin typeface="Verdana" pitchFamily="34" charset="0"/>
-                <a:ea typeface="Verdana" pitchFamily="34" charset="-122"/>
-                <a:cs typeface="Verdana" pitchFamily="34" charset="-120"/>
-              </a:rPr>
-              <a:t>"Did the breath help you move?"</a:t>
+              <a:t>Do 5 slow rounds. Then 5 more, focusing on the breath.</a:t>
             </a:r>
             <a:endParaRPr lang="en-US" sz="1200" dirty="0"/>
           </a:p>
@@ -4600,7 +5112,7 @@
                 <a:ea typeface="Georgia" pitchFamily="34" charset="-122"/>
                 <a:cs typeface="Georgia" pitchFamily="34" charset="-120"/>
               </a:rPr>
-              <a:t>Close (close)</a:t>
+              <a:t>Animal sound bonus (4 min)</a:t>
             </a:r>
             <a:endParaRPr lang="en-US" sz="1800" dirty="0"/>
           </a:p>
@@ -4640,7 +5152,7 @@
               <a:buNone/>
             </a:pPr>
             <a:r>
-              <a:rPr lang="en-US" sz="1200" dirty="0">
+              <a:rPr lang="en-US" sz="1200" i="1" dirty="0">
                 <a:solidFill>
                   <a:srgbClr val="2C2C2C"/>
                 </a:solidFill>
@@ -4648,7 +5160,7 @@
                 <a:ea typeface="Verdana" pitchFamily="34" charset="-122"/>
                 <a:cs typeface="Verdana" pitchFamily="34" charset="-120"/>
               </a:rPr>
-              <a:t>Tāḍāsana. Namaste.</a:t>
+              <a:t>"Animal sounds are allowed. Cows say 'moo.' Cats say 'meow.' Try making the sound on each pose."</a:t>
             </a:r>
             <a:endParaRPr lang="en-US" sz="1200" dirty="0"/>
           </a:p>
